--- a/ゲーム科3年/00_前期/オンラインゲームプログラミングⅡ/02_Fusionの仕組み.pptx
+++ b/ゲーム科3年/00_前期/オンラインゲームプログラミングⅡ/02_Fusionの仕組み.pptx
@@ -263,7 +263,7 @@
           <a:p>
             <a:fld id="{E9CC885B-4903-4D54-9A93-00025F12DED9}" type="datetimeFigureOut">
               <a:rPr kumimoji="1" lang="ja-JP" altLang="en-US" smtClean="0"/>
-              <a:t>2026/4/24</a:t>
+              <a:t>2026/5/18</a:t>
             </a:fld>
             <a:endParaRPr kumimoji="1" lang="ja-JP" altLang="en-US"/>
           </a:p>
@@ -493,7 +493,7 @@
           <a:p>
             <a:fld id="{E9CC885B-4903-4D54-9A93-00025F12DED9}" type="datetimeFigureOut">
               <a:rPr kumimoji="1" lang="ja-JP" altLang="en-US" smtClean="0"/>
-              <a:t>2026/4/24</a:t>
+              <a:t>2026/5/18</a:t>
             </a:fld>
             <a:endParaRPr kumimoji="1" lang="ja-JP" altLang="en-US"/>
           </a:p>
@@ -733,7 +733,7 @@
           <a:p>
             <a:fld id="{E9CC885B-4903-4D54-9A93-00025F12DED9}" type="datetimeFigureOut">
               <a:rPr kumimoji="1" lang="ja-JP" altLang="en-US" smtClean="0"/>
-              <a:t>2026/4/24</a:t>
+              <a:t>2026/5/18</a:t>
             </a:fld>
             <a:endParaRPr kumimoji="1" lang="ja-JP" altLang="en-US"/>
           </a:p>
@@ -963,7 +963,7 @@
           <a:p>
             <a:fld id="{E9CC885B-4903-4D54-9A93-00025F12DED9}" type="datetimeFigureOut">
               <a:rPr kumimoji="1" lang="ja-JP" altLang="en-US" smtClean="0"/>
-              <a:t>2026/4/24</a:t>
+              <a:t>2026/5/18</a:t>
             </a:fld>
             <a:endParaRPr kumimoji="1" lang="ja-JP" altLang="en-US"/>
           </a:p>
@@ -1238,7 +1238,7 @@
           <a:p>
             <a:fld id="{E9CC885B-4903-4D54-9A93-00025F12DED9}" type="datetimeFigureOut">
               <a:rPr kumimoji="1" lang="ja-JP" altLang="en-US" smtClean="0"/>
-              <a:t>2026/4/24</a:t>
+              <a:t>2026/5/18</a:t>
             </a:fld>
             <a:endParaRPr kumimoji="1" lang="ja-JP" altLang="en-US"/>
           </a:p>
@@ -1567,7 +1567,7 @@
           <a:p>
             <a:fld id="{E9CC885B-4903-4D54-9A93-00025F12DED9}" type="datetimeFigureOut">
               <a:rPr kumimoji="1" lang="ja-JP" altLang="en-US" smtClean="0"/>
-              <a:t>2026/4/24</a:t>
+              <a:t>2026/5/18</a:t>
             </a:fld>
             <a:endParaRPr kumimoji="1" lang="ja-JP" altLang="en-US"/>
           </a:p>
@@ -2043,7 +2043,7 @@
           <a:p>
             <a:fld id="{E9CC885B-4903-4D54-9A93-00025F12DED9}" type="datetimeFigureOut">
               <a:rPr kumimoji="1" lang="ja-JP" altLang="en-US" smtClean="0"/>
-              <a:t>2026/4/24</a:t>
+              <a:t>2026/5/18</a:t>
             </a:fld>
             <a:endParaRPr kumimoji="1" lang="ja-JP" altLang="en-US"/>
           </a:p>
@@ -2184,7 +2184,7 @@
           <a:p>
             <a:fld id="{E9CC885B-4903-4D54-9A93-00025F12DED9}" type="datetimeFigureOut">
               <a:rPr kumimoji="1" lang="ja-JP" altLang="en-US" smtClean="0"/>
-              <a:t>2026/4/24</a:t>
+              <a:t>2026/5/18</a:t>
             </a:fld>
             <a:endParaRPr kumimoji="1" lang="ja-JP" altLang="en-US"/>
           </a:p>
@@ -2297,7 +2297,7 @@
           <a:p>
             <a:fld id="{E9CC885B-4903-4D54-9A93-00025F12DED9}" type="datetimeFigureOut">
               <a:rPr kumimoji="1" lang="ja-JP" altLang="en-US" smtClean="0"/>
-              <a:t>2026/4/24</a:t>
+              <a:t>2026/5/18</a:t>
             </a:fld>
             <a:endParaRPr kumimoji="1" lang="ja-JP" altLang="en-US"/>
           </a:p>
@@ -2640,7 +2640,7 @@
           <a:p>
             <a:fld id="{E9CC885B-4903-4D54-9A93-00025F12DED9}" type="datetimeFigureOut">
               <a:rPr kumimoji="1" lang="ja-JP" altLang="en-US" smtClean="0"/>
-              <a:t>2026/4/24</a:t>
+              <a:t>2026/5/18</a:t>
             </a:fld>
             <a:endParaRPr kumimoji="1" lang="ja-JP" altLang="en-US"/>
           </a:p>
@@ -2928,7 +2928,7 @@
           <a:p>
             <a:fld id="{E9CC885B-4903-4D54-9A93-00025F12DED9}" type="datetimeFigureOut">
               <a:rPr kumimoji="1" lang="ja-JP" altLang="en-US" smtClean="0"/>
-              <a:t>2026/4/24</a:t>
+              <a:t>2026/5/18</a:t>
             </a:fld>
             <a:endParaRPr kumimoji="1" lang="ja-JP" altLang="en-US"/>
           </a:p>
@@ -3201,7 +3201,7 @@
           <a:p>
             <a:fld id="{E9CC885B-4903-4D54-9A93-00025F12DED9}" type="datetimeFigureOut">
               <a:rPr kumimoji="1" lang="ja-JP" altLang="en-US" smtClean="0"/>
-              <a:t>2026/4/24</a:t>
+              <a:t>2026/5/18</a:t>
             </a:fld>
             <a:endParaRPr kumimoji="1" lang="ja-JP" altLang="en-US"/>
           </a:p>
@@ -4062,7 +4062,7 @@
                   <a:srgbClr val="FF0000"/>
                 </a:solidFill>
               </a:rPr>
-              <a:t>２．サーバーが受信した入力で移動、座標返信</a:t>
+              <a:t>２．サーバーが受信した入力で移動、座標更新</a:t>
             </a:r>
             <a:endParaRPr lang="en-US" altLang="ja-JP" sz="2400" b="1" dirty="0">
               <a:solidFill>

--- a/ゲーム科3年/00_前期/オンラインゲームプログラミングⅡ/02_Fusionの仕組み.pptx
+++ b/ゲーム科3年/00_前期/オンラインゲームプログラミングⅡ/02_Fusionの仕組み.pptx
@@ -263,7 +263,7 @@
           <a:p>
             <a:fld id="{E9CC885B-4903-4D54-9A93-00025F12DED9}" type="datetimeFigureOut">
               <a:rPr kumimoji="1" lang="ja-JP" altLang="en-US" smtClean="0"/>
-              <a:t>2026/5/18</a:t>
+              <a:t>2026/8/28</a:t>
             </a:fld>
             <a:endParaRPr kumimoji="1" lang="ja-JP" altLang="en-US"/>
           </a:p>
@@ -493,7 +493,7 @@
           <a:p>
             <a:fld id="{E9CC885B-4903-4D54-9A93-00025F12DED9}" type="datetimeFigureOut">
               <a:rPr kumimoji="1" lang="ja-JP" altLang="en-US" smtClean="0"/>
-              <a:t>2026/5/18</a:t>
+              <a:t>2026/8/28</a:t>
             </a:fld>
             <a:endParaRPr kumimoji="1" lang="ja-JP" altLang="en-US"/>
           </a:p>
@@ -733,7 +733,7 @@
           <a:p>
             <a:fld id="{E9CC885B-4903-4D54-9A93-00025F12DED9}" type="datetimeFigureOut">
               <a:rPr kumimoji="1" lang="ja-JP" altLang="en-US" smtClean="0"/>
-              <a:t>2026/5/18</a:t>
+              <a:t>2026/8/28</a:t>
             </a:fld>
             <a:endParaRPr kumimoji="1" lang="ja-JP" altLang="en-US"/>
           </a:p>
@@ -963,7 +963,7 @@
           <a:p>
             <a:fld id="{E9CC885B-4903-4D54-9A93-00025F12DED9}" type="datetimeFigureOut">
               <a:rPr kumimoji="1" lang="ja-JP" altLang="en-US" smtClean="0"/>
-              <a:t>2026/5/18</a:t>
+              <a:t>2026/8/28</a:t>
             </a:fld>
             <a:endParaRPr kumimoji="1" lang="ja-JP" altLang="en-US"/>
           </a:p>
@@ -1238,7 +1238,7 @@
           <a:p>
             <a:fld id="{E9CC885B-4903-4D54-9A93-00025F12DED9}" type="datetimeFigureOut">
               <a:rPr kumimoji="1" lang="ja-JP" altLang="en-US" smtClean="0"/>
-              <a:t>2026/5/18</a:t>
+              <a:t>2026/8/28</a:t>
             </a:fld>
             <a:endParaRPr kumimoji="1" lang="ja-JP" altLang="en-US"/>
           </a:p>
@@ -1567,7 +1567,7 @@
           <a:p>
             <a:fld id="{E9CC885B-4903-4D54-9A93-00025F12DED9}" type="datetimeFigureOut">
               <a:rPr kumimoji="1" lang="ja-JP" altLang="en-US" smtClean="0"/>
-              <a:t>2026/5/18</a:t>
+              <a:t>2026/8/28</a:t>
             </a:fld>
             <a:endParaRPr kumimoji="1" lang="ja-JP" altLang="en-US"/>
           </a:p>
@@ -2043,7 +2043,7 @@
           <a:p>
             <a:fld id="{E9CC885B-4903-4D54-9A93-00025F12DED9}" type="datetimeFigureOut">
               <a:rPr kumimoji="1" lang="ja-JP" altLang="en-US" smtClean="0"/>
-              <a:t>2026/5/18</a:t>
+              <a:t>2026/8/28</a:t>
             </a:fld>
             <a:endParaRPr kumimoji="1" lang="ja-JP" altLang="en-US"/>
           </a:p>
@@ -2184,7 +2184,7 @@
           <a:p>
             <a:fld id="{E9CC885B-4903-4D54-9A93-00025F12DED9}" type="datetimeFigureOut">
               <a:rPr kumimoji="1" lang="ja-JP" altLang="en-US" smtClean="0"/>
-              <a:t>2026/5/18</a:t>
+              <a:t>2026/8/28</a:t>
             </a:fld>
             <a:endParaRPr kumimoji="1" lang="ja-JP" altLang="en-US"/>
           </a:p>
@@ -2297,7 +2297,7 @@
           <a:p>
             <a:fld id="{E9CC885B-4903-4D54-9A93-00025F12DED9}" type="datetimeFigureOut">
               <a:rPr kumimoji="1" lang="ja-JP" altLang="en-US" smtClean="0"/>
-              <a:t>2026/5/18</a:t>
+              <a:t>2026/8/28</a:t>
             </a:fld>
             <a:endParaRPr kumimoji="1" lang="ja-JP" altLang="en-US"/>
           </a:p>
@@ -2640,7 +2640,7 @@
           <a:p>
             <a:fld id="{E9CC885B-4903-4D54-9A93-00025F12DED9}" type="datetimeFigureOut">
               <a:rPr kumimoji="1" lang="ja-JP" altLang="en-US" smtClean="0"/>
-              <a:t>2026/5/18</a:t>
+              <a:t>2026/8/28</a:t>
             </a:fld>
             <a:endParaRPr kumimoji="1" lang="ja-JP" altLang="en-US"/>
           </a:p>
@@ -2928,7 +2928,7 @@
           <a:p>
             <a:fld id="{E9CC885B-4903-4D54-9A93-00025F12DED9}" type="datetimeFigureOut">
               <a:rPr kumimoji="1" lang="ja-JP" altLang="en-US" smtClean="0"/>
-              <a:t>2026/5/18</a:t>
+              <a:t>2026/8/28</a:t>
             </a:fld>
             <a:endParaRPr kumimoji="1" lang="ja-JP" altLang="en-US"/>
           </a:p>
@@ -3201,7 +3201,7 @@
           <a:p>
             <a:fld id="{E9CC885B-4903-4D54-9A93-00025F12DED9}" type="datetimeFigureOut">
               <a:rPr kumimoji="1" lang="ja-JP" altLang="en-US" smtClean="0"/>
-              <a:t>2026/5/18</a:t>
+              <a:t>2026/8/28</a:t>
             </a:fld>
             <a:endParaRPr kumimoji="1" lang="ja-JP" altLang="en-US"/>
           </a:p>
@@ -3818,7 +3818,7 @@
         <p:spPr>
           <a:xfrm>
             <a:off x="567542" y="1216429"/>
-            <a:ext cx="6354625" cy="3416320"/>
+            <a:ext cx="8816837" cy="3416320"/>
           </a:xfrm>
           <a:prstGeom prst="rect">
             <a:avLst/>
@@ -3886,14 +3886,14 @@
           <a:p>
             <a:r>
               <a:rPr lang="ja-JP" altLang="en-US" sz="2400" dirty="0"/>
-              <a:t>　サーバーが管理するクラス</a:t>
+              <a:t>　クライアントもしくはサーバーが管理するクラス</a:t>
             </a:r>
             <a:endParaRPr lang="en-US" altLang="ja-JP" sz="2400" dirty="0"/>
           </a:p>
           <a:p>
             <a:r>
               <a:rPr lang="ja-JP" altLang="en-US" sz="2400" dirty="0"/>
-              <a:t>　状態を管理する</a:t>
+              <a:t>　サーバー側は状態を管理する</a:t>
             </a:r>
             <a:r>
               <a:rPr lang="en-US" altLang="ja-JP" sz="2400" b="1" dirty="0" err="1">
@@ -3905,14 +3905,14 @@
             </a:r>
             <a:r>
               <a:rPr lang="ja-JP" altLang="en-US" sz="2400" dirty="0"/>
-              <a:t>と、</a:t>
+              <a:t>、</a:t>
             </a:r>
             <a:endParaRPr lang="en-US" altLang="ja-JP" sz="2400" dirty="0"/>
           </a:p>
           <a:p>
             <a:r>
               <a:rPr lang="ja-JP" altLang="en-US" sz="2400" dirty="0"/>
-              <a:t>　入力を管理する</a:t>
+              <a:t>　クライアント側は入力を管理する</a:t>
             </a:r>
             <a:r>
               <a:rPr lang="en-US" altLang="ja-JP" sz="2400" b="1" dirty="0" err="1">
@@ -4718,7 +4718,7 @@
         <p:spPr>
           <a:xfrm>
             <a:off x="567542" y="4810575"/>
-            <a:ext cx="9345828" cy="461665"/>
+            <a:ext cx="10341293" cy="461665"/>
           </a:xfrm>
           <a:prstGeom prst="rect">
             <a:avLst/>
@@ -4737,15 +4737,7 @@
             </a:r>
             <a:r>
               <a:rPr kumimoji="1" lang="ja-JP" altLang="en-US" sz="2400" dirty="0"/>
-              <a:t>大規模なプロジェクトだと別々に</a:t>
-            </a:r>
-            <a:r>
-              <a:rPr kumimoji="1" lang="en-US" altLang="ja-JP" sz="2400" dirty="0"/>
-              <a:t>Exe</a:t>
-            </a:r>
-            <a:r>
-              <a:rPr kumimoji="1" lang="ja-JP" altLang="en-US" sz="2400" dirty="0"/>
-              <a:t>を作ることがあります。</a:t>
+              <a:t>大規模なプロジェクトだと別々にプロジェクトを作ることがあります。</a:t>
             </a:r>
             <a:endParaRPr lang="en-US" altLang="ja-JP" sz="2400" dirty="0"/>
           </a:p>
@@ -4840,7 +4832,7 @@
         <p:spPr>
           <a:xfrm>
             <a:off x="567542" y="1216429"/>
-            <a:ext cx="11365612" cy="3785652"/>
+            <a:ext cx="11505073" cy="3785652"/>
           </a:xfrm>
           <a:prstGeom prst="rect">
             <a:avLst/>
@@ -4895,7 +4887,11 @@
               <a:t>の初期設定をしたり、</a:t>
             </a:r>
             <a:r>
-              <a:rPr lang="en-US" altLang="ja-JP" sz="2400" dirty="0" err="1"/>
+              <a:rPr lang="en-US" altLang="ja-JP" sz="2400" b="1" dirty="0" err="1">
+                <a:solidFill>
+                  <a:srgbClr val="00B050"/>
+                </a:solidFill>
+              </a:rPr>
               <a:t>NetworkRunner</a:t>
             </a:r>
             <a:r>
